--- a/public/fun/pack/pptx/weddingpro/결혼식프리미엄_44_오시는길중심_샴페인누아르.pptx
+++ b/public/fun/pack/pptx/weddingpro/결혼식프리미엄_44_오시는길중심_샴페인누아르.pptx
@@ -113,12 +113,12 @@
   <p:extLst>
     <p:ext uri="{521415D9-36F7-43E2-AB2F-B90AF26B5E84}">
       <p14:sectionLst xmlns:p14="http://schemas.microsoft.com/office/powerpoint/2010/main">
-        <p14:section name="시작" id="{7D363D3A-C888-452D-8FFF-5DDE2AFBF2FA}">
+        <p14:section name="시작" id="{219167C0-B8C0-4D26-AC31-DA66ADA66AE0}">
           <p14:sldIdLst>
             <p14:sldId id="256"/>
           </p14:sldIdLst>
         </p14:section>
-        <p14:section name="본문" id="{125D157E-AC49-4F36-9413-222D52300A49}">
+        <p14:section name="본문" id="{182E0839-5732-4475-BC9B-0238AA8EDE56}">
           <p14:sldIdLst>
             <p14:sldId id="257"/>
             <p14:sldId id="258"/>
@@ -127,7 +127,7 @@
             <p14:sldId id="261"/>
           </p14:sldIdLst>
         </p14:section>
-        <p14:section name="마무리" id="{A2477942-EA4B-439C-86F3-52100C4CFDAD}">
+        <p14:section name="마무리" id="{D3A852E9-0103-4FAA-98B4-A631A1E9D02B}">
           <p14:sldIdLst>
             <p14:sldId id="262"/>
           </p14:sldIdLst>
@@ -1597,7 +1597,7 @@
             </a:lvl1pPr>
           </a:lstStyle>
           <a:p>
-            <a:fld id="{548A59E4-C124-40A1-AB3F-EC8A978853C3}" type="slidenum">
+            <a:fld id="{94EF5F4D-7F63-4504-BC7A-7B497256DC45}" type="slidenum">
               <a:rPr lang="en-US"/>
               <a:t>‹#›</a:t>
             </a:fld>
@@ -2357,7 +2357,7 @@
             </a:lvl1pPr>
           </a:lstStyle>
           <a:p>
-            <a:fld id="{F669B430-850A-4F44-A00B-D820C2C4001A}" type="slidenum">
+            <a:fld id="{EE8DD017-0F4D-413C-A7D4-00B730A93FF0}" type="slidenum">
               <a:rPr lang="en-US"/>
               <a:t>‹#›</a:t>
             </a:fld>
@@ -3041,7 +3041,7 @@
             </a:lvl1pPr>
           </a:lstStyle>
           <a:p>
-            <a:fld id="{B3C2950E-E77F-4F2D-886D-5223AE9E7F11}" type="slidenum">
+            <a:fld id="{F1D6223F-DC86-4FC1-9402-208C9969620D}" type="slidenum">
               <a:rPr lang="en-US"/>
               <a:t>‹#›</a:t>
             </a:fld>
@@ -3864,7 +3864,7 @@
           <a:p>
             <a:r>
               <a:rPr lang="ko-KR"/>
-              <a:t>눈이 오면 대중교통이 편합니다</a:t>
+              <a:t>대중교통으로 오시는 게 편합니다</a:t>
             </a:r>
           </a:p>
         </p:txBody>
@@ -3892,7 +3892,7 @@
           <a:p>
             <a:r>
               <a:rPr lang="ko-KR"/>
-              <a:t>0000. 00. 00 · 예식장 이름</a:t>
+              <a:t>날짜 입력 · 예식장 이름</a:t>
             </a:r>
           </a:p>
         </p:txBody>
@@ -4125,7 +4125,7 @@
           <a:bodyPr/>
           <a:lstStyle/>
           <a:p>
-            <a:fld id="{62975DE1-AB37-40E0-B942-83AE7F06DEF0}" type="slidenum">
+            <a:fld id="{14E1BFDE-5C19-4F83-B652-637E1AEDD7FC}" type="slidenum">
               <a:rPr lang="en-US"/>
               <a:t>‹#›</a:t>
             </a:fld>
@@ -4644,7 +4644,7 @@
           <a:bodyPr/>
           <a:lstStyle/>
           <a:p>
-            <a:fld id="{C064FA67-C4C8-4828-857C-1561BBDC1D75}" type="slidenum">
+            <a:fld id="{393E0446-ED99-4E93-B32F-71CF6F69EA5C}" type="slidenum">
               <a:rPr lang="en-US"/>
               <a:t>‹#›</a:t>
             </a:fld>
@@ -5082,7 +5082,7 @@
           <a:bodyPr/>
           <a:lstStyle/>
           <a:p>
-            <a:fld id="{A14F5EE1-2CDA-4E64-8F83-07EA645391DA}" type="slidenum">
+            <a:fld id="{622F809E-D004-4B9B-9954-A556D963AC3F}" type="slidenum">
               <a:rPr lang="en-US"/>
               <a:t>‹#›</a:t>
             </a:fld>
@@ -6454,7 +6454,7 @@
           <a:bodyPr/>
           <a:lstStyle/>
           <a:p>
-            <a:fld id="{A5949E7B-AEA5-4135-AEF9-CAFA6AEB6C8C}" type="slidenum">
+            <a:fld id="{B3DE8816-B061-44B9-8C57-4DD693490C98}" type="slidenum">
               <a:rPr lang="en-US"/>
               <a:t>‹#›</a:t>
             </a:fld>
@@ -6542,7 +6542,7 @@
           <a:bodyPr/>
           <a:lstStyle/>
           <a:p>
-            <a:fld id="{654E5CEF-BB71-49B8-9986-8B4130F3BA56}" type="slidenum">
+            <a:fld id="{9B0C3B63-E2C8-42EE-ABD6-ABB436A6E3F4}" type="slidenum">
               <a:rPr lang="en-US"/>
               <a:t>‹#›</a:t>
             </a:fld>
